--- a/3차시_PPT.pptx
+++ b/3차시_PPT.pptx
@@ -629,6 +629,14 @@
             <a:r>
               <a:rPr lang="ko-KR" altLang="en-US"/>
               <a:t> 미리캔버스</a:t>
+            </a:r>
+            <a:r>
+              <a:rPr lang="en-US" altLang="ko-KR"/>
+              <a:t>, AI</a:t>
+            </a:r>
+            <a:r>
+              <a:rPr lang="ko-KR" altLang="en-US"/>
+              <a:t> 활용 이미지</a:t>
             </a:r>
             <a:endParaRPr lang="ko-KR" altLang="en-US"/>
           </a:p>
@@ -14940,7 +14948,7 @@
 </file>
 
 <file path=ppt/slides/slide17.xml><?xml version="1.0" encoding="utf-8"?>
-<p:sld xmlns:a="http://schemas.openxmlformats.org/drawingml/2006/main" xmlns:r="http://schemas.openxmlformats.org/officeDocument/2006/relationships" xmlns:p="http://schemas.openxmlformats.org/presentationml/2006/main">
+<p:sld xmlns:r="http://schemas.openxmlformats.org/officeDocument/2006/relationships" xmlns:c="http://schemas.openxmlformats.org/drawingml/2006/chart" xmlns:a="http://schemas.openxmlformats.org/drawingml/2006/main" xmlns:dgm="http://schemas.openxmlformats.org/drawingml/2006/diagram" xmlns:dsp="http://schemas.microsoft.com/office/drawing/2008/diagram" xmlns:p="http://schemas.openxmlformats.org/presentationml/2006/main">
   <p:cSld>
     <p:spTree>
       <p:nvGrpSpPr>
@@ -15495,7 +15503,7 @@
           <p:nvPr/>
         </p:nvPicPr>
         <p:blipFill>
-          <a:blip r:embed="rId3"/>
+          <a:blip r:embed="rId5"/>
           <a:stretch>
             <a:fillRect/>
           </a:stretch>
@@ -15510,6 +15518,101 @@
           </a:prstGeom>
         </p:spPr>
       </p:pic>
+      <p:sp>
+        <p:nvSpPr>
+          <p:cNvPr id="24" name="가로 글상자 23"/>
+          <p:cNvSpPr txBox="1"/>
+          <p:nvPr/>
+        </p:nvSpPr>
+        <p:spPr>
+          <a:xfrm>
+            <a:off x="9162218" y="6168936"/>
+            <a:ext cx="2902783" cy="220747"/>
+          </a:xfrm>
+          <a:prstGeom prst="rect">
+            <a:avLst/>
+          </a:prstGeom>
+        </p:spPr>
+        <p:txBody>
+          <a:bodyPr wrap="square">
+            <a:spAutoFit/>
+          </a:bodyPr>
+          <a:p>
+            <a:pPr lvl="0" algn="r">
+              <a:defRPr/>
+            </a:pPr>
+            <a:r>
+              <a:rPr lang="en-US" altLang="ko-KR" sz="900">
+                <a:solidFill>
+                  <a:srgbClr val="f2f2f2"/>
+                </a:solidFill>
+              </a:rPr>
+              <a:t>*</a:t>
+            </a:r>
+            <a:r>
+              <a:rPr lang="ko-KR" altLang="en-US" sz="900">
+                <a:solidFill>
+                  <a:srgbClr val="f2f2f2"/>
+                </a:solidFill>
+              </a:rPr>
+              <a:t>이미지 출처</a:t>
+            </a:r>
+            <a:r>
+              <a:rPr lang="en-US" altLang="ko-KR" sz="900">
+                <a:solidFill>
+                  <a:srgbClr val="f2f2f2"/>
+                </a:solidFill>
+              </a:rPr>
+              <a:t>:</a:t>
+            </a:r>
+            <a:r>
+              <a:rPr lang="ko-KR" altLang="en-US" sz="900">
+                <a:solidFill>
+                  <a:srgbClr val="f2f2f2"/>
+                </a:solidFill>
+              </a:rPr>
+              <a:t> 미리캔버스</a:t>
+            </a:r>
+            <a:r>
+              <a:rPr lang="en-US" altLang="ko-KR" sz="900">
+                <a:solidFill>
+                  <a:srgbClr val="f2f2f2"/>
+                </a:solidFill>
+              </a:rPr>
+              <a:t>,</a:t>
+            </a:r>
+            <a:r>
+              <a:rPr lang="ko-KR" altLang="en-US" sz="900">
+                <a:solidFill>
+                  <a:srgbClr val="f2f2f2"/>
+                </a:solidFill>
+              </a:rPr>
+              <a:t> </a:t>
+            </a:r>
+            <a:r>
+              <a:rPr lang="en-US" altLang="ko-KR" sz="900">
+                <a:solidFill>
+                  <a:srgbClr val="f2f2f2"/>
+                </a:solidFill>
+              </a:rPr>
+              <a:t>AI</a:t>
+            </a:r>
+            <a:r>
+              <a:rPr lang="ko-KR" altLang="en-US" sz="900">
+                <a:solidFill>
+                  <a:srgbClr val="f2f2f2"/>
+                </a:solidFill>
+              </a:rPr>
+              <a:t> 활용 이미지</a:t>
+            </a:r>
+            <a:endParaRPr lang="ko-KR" altLang="en-US" sz="900">
+              <a:solidFill>
+                <a:srgbClr val="f2f2f2"/>
+              </a:solidFill>
+            </a:endParaRPr>
+          </a:p>
+        </p:txBody>
+      </p:sp>
     </p:spTree>
     <p:extLst>
       <p:ext uri="{BB962C8B-B14F-4D97-AF65-F5344CB8AC3E}">
@@ -15524,7 +15627,7 @@
 </file>
 
 <file path=ppt/slides/slide18.xml><?xml version="1.0" encoding="utf-8"?>
-<p:sld xmlns:a="http://schemas.openxmlformats.org/drawingml/2006/main" xmlns:r="http://schemas.openxmlformats.org/officeDocument/2006/relationships" xmlns:p="http://schemas.openxmlformats.org/presentationml/2006/main">
+<p:sld xmlns:r="http://schemas.openxmlformats.org/officeDocument/2006/relationships" xmlns:c="http://schemas.openxmlformats.org/drawingml/2006/chart" xmlns:a="http://schemas.openxmlformats.org/drawingml/2006/main" xmlns:dgm="http://schemas.openxmlformats.org/drawingml/2006/diagram" xmlns:dsp="http://schemas.microsoft.com/office/drawing/2008/diagram" xmlns:p="http://schemas.openxmlformats.org/presentationml/2006/main">
   <p:cSld>
     <p:spTree>
       <p:nvGrpSpPr>
@@ -16086,7 +16189,7 @@
           <p:nvPr/>
         </p:nvPicPr>
         <p:blipFill rotWithShape="1">
-          <a:blip r:embed="rId3"/>
+          <a:blip r:embed="rId5"/>
           <a:srcRect b="26908"/>
           <a:stretch/>
         </p:blipFill>
@@ -16100,6 +16203,101 @@
           </a:prstGeom>
         </p:spPr>
       </p:pic>
+      <p:sp>
+        <p:nvSpPr>
+          <p:cNvPr id="23" name="가로 글상자 22"/>
+          <p:cNvSpPr txBox="1"/>
+          <p:nvPr/>
+        </p:nvSpPr>
+        <p:spPr>
+          <a:xfrm>
+            <a:off x="9162218" y="6168936"/>
+            <a:ext cx="2902783" cy="220747"/>
+          </a:xfrm>
+          <a:prstGeom prst="rect">
+            <a:avLst/>
+          </a:prstGeom>
+        </p:spPr>
+        <p:txBody>
+          <a:bodyPr wrap="square">
+            <a:spAutoFit/>
+          </a:bodyPr>
+          <a:p>
+            <a:pPr lvl="0" algn="r">
+              <a:defRPr/>
+            </a:pPr>
+            <a:r>
+              <a:rPr lang="en-US" altLang="ko-KR" sz="900">
+                <a:solidFill>
+                  <a:srgbClr val="f2f2f2"/>
+                </a:solidFill>
+              </a:rPr>
+              <a:t>*</a:t>
+            </a:r>
+            <a:r>
+              <a:rPr lang="ko-KR" altLang="en-US" sz="900">
+                <a:solidFill>
+                  <a:srgbClr val="f2f2f2"/>
+                </a:solidFill>
+              </a:rPr>
+              <a:t>이미지 출처</a:t>
+            </a:r>
+            <a:r>
+              <a:rPr lang="en-US" altLang="ko-KR" sz="900">
+                <a:solidFill>
+                  <a:srgbClr val="f2f2f2"/>
+                </a:solidFill>
+              </a:rPr>
+              <a:t>:</a:t>
+            </a:r>
+            <a:r>
+              <a:rPr lang="ko-KR" altLang="en-US" sz="900">
+                <a:solidFill>
+                  <a:srgbClr val="f2f2f2"/>
+                </a:solidFill>
+              </a:rPr>
+              <a:t> 미리캔버스</a:t>
+            </a:r>
+            <a:r>
+              <a:rPr lang="en-US" altLang="ko-KR" sz="900">
+                <a:solidFill>
+                  <a:srgbClr val="f2f2f2"/>
+                </a:solidFill>
+              </a:rPr>
+              <a:t>,</a:t>
+            </a:r>
+            <a:r>
+              <a:rPr lang="ko-KR" altLang="en-US" sz="900">
+                <a:solidFill>
+                  <a:srgbClr val="f2f2f2"/>
+                </a:solidFill>
+              </a:rPr>
+              <a:t> </a:t>
+            </a:r>
+            <a:r>
+              <a:rPr lang="en-US" altLang="ko-KR" sz="900">
+                <a:solidFill>
+                  <a:srgbClr val="f2f2f2"/>
+                </a:solidFill>
+              </a:rPr>
+              <a:t>AI</a:t>
+            </a:r>
+            <a:r>
+              <a:rPr lang="ko-KR" altLang="en-US" sz="900">
+                <a:solidFill>
+                  <a:srgbClr val="f2f2f2"/>
+                </a:solidFill>
+              </a:rPr>
+              <a:t> 활용 이미지</a:t>
+            </a:r>
+            <a:endParaRPr lang="ko-KR" altLang="en-US" sz="900">
+              <a:solidFill>
+                <a:srgbClr val="f2f2f2"/>
+              </a:solidFill>
+            </a:endParaRPr>
+          </a:p>
+        </p:txBody>
+      </p:sp>
     </p:spTree>
     <p:extLst>
       <p:ext uri="{BB962C8B-B14F-4D97-AF65-F5344CB8AC3E}">
@@ -17376,6 +17574,53 @@
           </a:prstGeom>
         </p:spPr>
       </p:pic>
+      <p:sp>
+        <p:nvSpPr>
+          <p:cNvPr id="15" name="가로 글상자 14"/>
+          <p:cNvSpPr txBox="1"/>
+          <p:nvPr/>
+        </p:nvSpPr>
+        <p:spPr>
+          <a:xfrm>
+            <a:off x="9162218" y="5683161"/>
+            <a:ext cx="2902783" cy="220747"/>
+          </a:xfrm>
+          <a:prstGeom prst="rect">
+            <a:avLst/>
+          </a:prstGeom>
+        </p:spPr>
+        <p:txBody>
+          <a:bodyPr wrap="square">
+            <a:spAutoFit/>
+          </a:bodyPr>
+          <a:p>
+            <a:pPr lvl="0" algn="r">
+              <a:defRPr/>
+            </a:pPr>
+            <a:r>
+              <a:rPr lang="en-US" altLang="ko-KR" sz="900">
+                <a:solidFill>
+                  <a:srgbClr val="ffef99"/>
+                </a:solidFill>
+              </a:rPr>
+              <a:t>AI</a:t>
+            </a:r>
+            <a:r>
+              <a:rPr lang="ko-KR" altLang="en-US" sz="900">
+                <a:solidFill>
+                  <a:srgbClr val="ffef99"/>
+                </a:solidFill>
+              </a:rPr>
+              <a:t> 활용 이미지</a:t>
+            </a:r>
+            <a:endParaRPr lang="ko-KR" altLang="en-US" sz="900">
+              <a:solidFill>
+                <a:srgbClr val="ffef99"/>
+              </a:solidFill>
+            </a:endParaRPr>
+          </a:p>
+        </p:txBody>
+      </p:sp>
     </p:spTree>
     <p:extLst>
       <p:ext uri="{BB962C8B-B14F-4D97-AF65-F5344CB8AC3E}">
@@ -20754,7 +20999,7 @@
 </file>
 
 <file path=ppt/slides/slide23.xml><?xml version="1.0" encoding="utf-8"?>
-<p:sld xmlns:a="http://schemas.openxmlformats.org/drawingml/2006/main" xmlns:r="http://schemas.openxmlformats.org/officeDocument/2006/relationships" xmlns:p="http://schemas.openxmlformats.org/presentationml/2006/main">
+<p:sld xmlns:r="http://schemas.openxmlformats.org/officeDocument/2006/relationships" xmlns:c="http://schemas.openxmlformats.org/drawingml/2006/chart" xmlns:a="http://schemas.openxmlformats.org/drawingml/2006/main" xmlns:dgm="http://schemas.openxmlformats.org/drawingml/2006/diagram" xmlns:dsp="http://schemas.microsoft.com/office/drawing/2008/diagram" xmlns:p="http://schemas.openxmlformats.org/presentationml/2006/main">
   <p:cSld>
     <p:spTree>
       <p:nvGrpSpPr>
@@ -21224,6 +21469,101 @@
           </a:prstGeom>
         </p:spPr>
       </p:pic>
+      <p:sp>
+        <p:nvSpPr>
+          <p:cNvPr id="24" name="가로 글상자 23"/>
+          <p:cNvSpPr txBox="1"/>
+          <p:nvPr/>
+        </p:nvSpPr>
+        <p:spPr>
+          <a:xfrm>
+            <a:off x="9162218" y="6168936"/>
+            <a:ext cx="2902783" cy="220747"/>
+          </a:xfrm>
+          <a:prstGeom prst="rect">
+            <a:avLst/>
+          </a:prstGeom>
+        </p:spPr>
+        <p:txBody>
+          <a:bodyPr wrap="square">
+            <a:spAutoFit/>
+          </a:bodyPr>
+          <a:p>
+            <a:pPr lvl="0" algn="r">
+              <a:defRPr/>
+            </a:pPr>
+            <a:r>
+              <a:rPr lang="en-US" altLang="ko-KR" sz="900">
+                <a:solidFill>
+                  <a:srgbClr val="f2f2f2"/>
+                </a:solidFill>
+              </a:rPr>
+              <a:t>*</a:t>
+            </a:r>
+            <a:r>
+              <a:rPr lang="ko-KR" altLang="en-US" sz="900">
+                <a:solidFill>
+                  <a:srgbClr val="f2f2f2"/>
+                </a:solidFill>
+              </a:rPr>
+              <a:t>이미지 출처</a:t>
+            </a:r>
+            <a:r>
+              <a:rPr lang="en-US" altLang="ko-KR" sz="900">
+                <a:solidFill>
+                  <a:srgbClr val="f2f2f2"/>
+                </a:solidFill>
+              </a:rPr>
+              <a:t>:</a:t>
+            </a:r>
+            <a:r>
+              <a:rPr lang="ko-KR" altLang="en-US" sz="900">
+                <a:solidFill>
+                  <a:srgbClr val="f2f2f2"/>
+                </a:solidFill>
+              </a:rPr>
+              <a:t> 미리캔버스</a:t>
+            </a:r>
+            <a:r>
+              <a:rPr lang="en-US" altLang="ko-KR" sz="900">
+                <a:solidFill>
+                  <a:srgbClr val="f2f2f2"/>
+                </a:solidFill>
+              </a:rPr>
+              <a:t>,</a:t>
+            </a:r>
+            <a:r>
+              <a:rPr lang="ko-KR" altLang="en-US" sz="900">
+                <a:solidFill>
+                  <a:srgbClr val="f2f2f2"/>
+                </a:solidFill>
+              </a:rPr>
+              <a:t> </a:t>
+            </a:r>
+            <a:r>
+              <a:rPr lang="en-US" altLang="ko-KR" sz="900">
+                <a:solidFill>
+                  <a:srgbClr val="f2f2f2"/>
+                </a:solidFill>
+              </a:rPr>
+              <a:t>AI</a:t>
+            </a:r>
+            <a:r>
+              <a:rPr lang="ko-KR" altLang="en-US" sz="900">
+                <a:solidFill>
+                  <a:srgbClr val="f2f2f2"/>
+                </a:solidFill>
+              </a:rPr>
+              <a:t> 활용 이미지</a:t>
+            </a:r>
+            <a:endParaRPr lang="ko-KR" altLang="en-US" sz="900">
+              <a:solidFill>
+                <a:srgbClr val="f2f2f2"/>
+              </a:solidFill>
+            </a:endParaRPr>
+          </a:p>
+        </p:txBody>
+      </p:sp>
     </p:spTree>
     <p:extLst>
       <p:ext uri="{BB962C8B-B14F-4D97-AF65-F5344CB8AC3E}">
@@ -21658,7 +21998,7 @@
 </file>
 
 <file path=ppt/slides/slide3.xml><?xml version="1.0" encoding="utf-8"?>
-<p:sld xmlns:a="http://schemas.openxmlformats.org/drawingml/2006/main" xmlns:r="http://schemas.openxmlformats.org/officeDocument/2006/relationships" xmlns:p="http://schemas.openxmlformats.org/presentationml/2006/main">
+<p:sld xmlns:r="http://schemas.openxmlformats.org/officeDocument/2006/relationships" xmlns:c="http://schemas.openxmlformats.org/drawingml/2006/chart" xmlns:a="http://schemas.openxmlformats.org/drawingml/2006/main" xmlns:dgm="http://schemas.openxmlformats.org/drawingml/2006/diagram" xmlns:dsp="http://schemas.microsoft.com/office/drawing/2008/diagram" xmlns:p="http://schemas.openxmlformats.org/presentationml/2006/main">
   <p:cSld>
     <p:spTree>
       <p:nvGrpSpPr>
@@ -21998,7 +22338,7 @@
           <p:nvPr/>
         </p:nvPicPr>
         <p:blipFill rotWithShape="1">
-          <a:blip r:embed="rId3">
+          <a:blip r:embed="rId4">
             <a:extLst>
               <a:ext uri="{28A0092B-C50C-407E-A947-70E740481C1C}">
                 <a14:useLocalDpi xmlns:a14="http://schemas.microsoft.com/office/drawing/2010/main" val="0"/>
@@ -22018,6 +22358,69 @@
           </a:prstGeom>
         </p:spPr>
       </p:pic>
+      <p:sp>
+        <p:nvSpPr>
+          <p:cNvPr id="15" name="가로 글상자 14"/>
+          <p:cNvSpPr txBox="1"/>
+          <p:nvPr/>
+        </p:nvSpPr>
+        <p:spPr>
+          <a:xfrm>
+            <a:off x="9162218" y="6168936"/>
+            <a:ext cx="2902783" cy="220747"/>
+          </a:xfrm>
+          <a:prstGeom prst="rect">
+            <a:avLst/>
+          </a:prstGeom>
+        </p:spPr>
+        <p:txBody>
+          <a:bodyPr wrap="square">
+            <a:spAutoFit/>
+          </a:bodyPr>
+          <a:p>
+            <a:pPr lvl="0" algn="r">
+              <a:defRPr/>
+            </a:pPr>
+            <a:r>
+              <a:rPr lang="en-US" altLang="ko-KR" sz="900">
+                <a:solidFill>
+                  <a:srgbClr val="f2f2f2"/>
+                </a:solidFill>
+              </a:rPr>
+              <a:t>*</a:t>
+            </a:r>
+            <a:r>
+              <a:rPr lang="ko-KR" altLang="en-US" sz="900">
+                <a:solidFill>
+                  <a:srgbClr val="f2f2f2"/>
+                </a:solidFill>
+              </a:rPr>
+              <a:t>이미지 출처</a:t>
+            </a:r>
+            <a:r>
+              <a:rPr lang="en-US" altLang="ko-KR" sz="900">
+                <a:solidFill>
+                  <a:srgbClr val="f2f2f2"/>
+                </a:solidFill>
+              </a:rPr>
+              <a:t>:</a:t>
+            </a:r>
+            <a:r>
+              <a:rPr lang="ko-KR" altLang="en-US" sz="900">
+                <a:solidFill>
+                  <a:srgbClr val="f2f2f2"/>
+                </a:solidFill>
+              </a:rPr>
+              <a:t> 미리캔버스</a:t>
+            </a:r>
+            <a:endParaRPr lang="ko-KR" altLang="en-US" sz="900">
+              <a:solidFill>
+                <a:srgbClr val="f2f2f2"/>
+              </a:solidFill>
+            </a:endParaRPr>
+          </a:p>
+        </p:txBody>
+      </p:sp>
     </p:spTree>
     <p:extLst>
       <p:ext uri="{BB962C8B-B14F-4D97-AF65-F5344CB8AC3E}">
@@ -23023,7 +23426,7 @@
 </file>
 
 <file path=ppt/slides/slide6.xml><?xml version="1.0" encoding="utf-8"?>
-<p:sld xmlns:a="http://schemas.openxmlformats.org/drawingml/2006/main" xmlns:r="http://schemas.openxmlformats.org/officeDocument/2006/relationships" xmlns:p="http://schemas.openxmlformats.org/presentationml/2006/main">
+<p:sld xmlns:r="http://schemas.openxmlformats.org/officeDocument/2006/relationships" xmlns:c="http://schemas.openxmlformats.org/drawingml/2006/chart" xmlns:a="http://schemas.openxmlformats.org/drawingml/2006/main" xmlns:dgm="http://schemas.openxmlformats.org/drawingml/2006/diagram" xmlns:dsp="http://schemas.microsoft.com/office/drawing/2008/diagram" xmlns:p="http://schemas.openxmlformats.org/presentationml/2006/main">
   <p:cSld>
     <p:spTree>
       <p:nvGrpSpPr>
@@ -23515,6 +23918,101 @@
           </a:prstGeom>
         </p:spPr>
       </p:pic>
+      <p:sp>
+        <p:nvSpPr>
+          <p:cNvPr id="21" name="가로 글상자 20"/>
+          <p:cNvSpPr txBox="1"/>
+          <p:nvPr/>
+        </p:nvSpPr>
+        <p:spPr>
+          <a:xfrm>
+            <a:off x="9162218" y="6168936"/>
+            <a:ext cx="2902783" cy="220747"/>
+          </a:xfrm>
+          <a:prstGeom prst="rect">
+            <a:avLst/>
+          </a:prstGeom>
+        </p:spPr>
+        <p:txBody>
+          <a:bodyPr wrap="square">
+            <a:spAutoFit/>
+          </a:bodyPr>
+          <a:p>
+            <a:pPr lvl="0" algn="r">
+              <a:defRPr/>
+            </a:pPr>
+            <a:r>
+              <a:rPr lang="en-US" altLang="ko-KR" sz="900">
+                <a:solidFill>
+                  <a:srgbClr val="f2f2f2"/>
+                </a:solidFill>
+              </a:rPr>
+              <a:t>*</a:t>
+            </a:r>
+            <a:r>
+              <a:rPr lang="ko-KR" altLang="en-US" sz="900">
+                <a:solidFill>
+                  <a:srgbClr val="f2f2f2"/>
+                </a:solidFill>
+              </a:rPr>
+              <a:t>이미지 출처</a:t>
+            </a:r>
+            <a:r>
+              <a:rPr lang="en-US" altLang="ko-KR" sz="900">
+                <a:solidFill>
+                  <a:srgbClr val="f2f2f2"/>
+                </a:solidFill>
+              </a:rPr>
+              <a:t>:</a:t>
+            </a:r>
+            <a:r>
+              <a:rPr lang="ko-KR" altLang="en-US" sz="900">
+                <a:solidFill>
+                  <a:srgbClr val="f2f2f2"/>
+                </a:solidFill>
+              </a:rPr>
+              <a:t> 미리캔버스</a:t>
+            </a:r>
+            <a:r>
+              <a:rPr lang="en-US" altLang="ko-KR" sz="900">
+                <a:solidFill>
+                  <a:srgbClr val="f2f2f2"/>
+                </a:solidFill>
+              </a:rPr>
+              <a:t>,</a:t>
+            </a:r>
+            <a:r>
+              <a:rPr lang="ko-KR" altLang="en-US" sz="900">
+                <a:solidFill>
+                  <a:srgbClr val="f2f2f2"/>
+                </a:solidFill>
+              </a:rPr>
+              <a:t> </a:t>
+            </a:r>
+            <a:r>
+              <a:rPr lang="en-US" altLang="ko-KR" sz="900">
+                <a:solidFill>
+                  <a:srgbClr val="f2f2f2"/>
+                </a:solidFill>
+              </a:rPr>
+              <a:t>AI</a:t>
+            </a:r>
+            <a:r>
+              <a:rPr lang="ko-KR" altLang="en-US" sz="900">
+                <a:solidFill>
+                  <a:srgbClr val="f2f2f2"/>
+                </a:solidFill>
+              </a:rPr>
+              <a:t> 활용 이미지</a:t>
+            </a:r>
+            <a:endParaRPr lang="ko-KR" altLang="en-US" sz="900">
+              <a:solidFill>
+                <a:srgbClr val="f2f2f2"/>
+              </a:solidFill>
+            </a:endParaRPr>
+          </a:p>
+        </p:txBody>
+      </p:sp>
     </p:spTree>
     <p:extLst>
       <p:ext uri="{BB962C8B-B14F-4D97-AF65-F5344CB8AC3E}">
@@ -23529,7 +24027,7 @@
 </file>
 
 <file path=ppt/slides/slide7.xml><?xml version="1.0" encoding="utf-8"?>
-<p:sld xmlns:a="http://schemas.openxmlformats.org/drawingml/2006/main" xmlns:r="http://schemas.openxmlformats.org/officeDocument/2006/relationships" xmlns:p="http://schemas.openxmlformats.org/presentationml/2006/main">
+<p:sld xmlns:r="http://schemas.openxmlformats.org/officeDocument/2006/relationships" xmlns:c="http://schemas.openxmlformats.org/drawingml/2006/chart" xmlns:a="http://schemas.openxmlformats.org/drawingml/2006/main" xmlns:dgm="http://schemas.openxmlformats.org/drawingml/2006/diagram" xmlns:dsp="http://schemas.microsoft.com/office/drawing/2008/diagram" xmlns:p="http://schemas.openxmlformats.org/presentationml/2006/main">
   <p:cSld>
     <p:spTree>
       <p:nvGrpSpPr>
@@ -24021,6 +24519,101 @@
           </a:prstGeom>
         </p:spPr>
       </p:pic>
+      <p:sp>
+        <p:nvSpPr>
+          <p:cNvPr id="21" name="가로 글상자 20"/>
+          <p:cNvSpPr txBox="1"/>
+          <p:nvPr/>
+        </p:nvSpPr>
+        <p:spPr>
+          <a:xfrm>
+            <a:off x="9162218" y="6168936"/>
+            <a:ext cx="2902783" cy="220747"/>
+          </a:xfrm>
+          <a:prstGeom prst="rect">
+            <a:avLst/>
+          </a:prstGeom>
+        </p:spPr>
+        <p:txBody>
+          <a:bodyPr wrap="square">
+            <a:spAutoFit/>
+          </a:bodyPr>
+          <a:p>
+            <a:pPr lvl="0" algn="r">
+              <a:defRPr/>
+            </a:pPr>
+            <a:r>
+              <a:rPr lang="en-US" altLang="ko-KR" sz="900">
+                <a:solidFill>
+                  <a:srgbClr val="f2f2f2"/>
+                </a:solidFill>
+              </a:rPr>
+              <a:t>*</a:t>
+            </a:r>
+            <a:r>
+              <a:rPr lang="ko-KR" altLang="en-US" sz="900">
+                <a:solidFill>
+                  <a:srgbClr val="f2f2f2"/>
+                </a:solidFill>
+              </a:rPr>
+              <a:t>이미지 출처</a:t>
+            </a:r>
+            <a:r>
+              <a:rPr lang="en-US" altLang="ko-KR" sz="900">
+                <a:solidFill>
+                  <a:srgbClr val="f2f2f2"/>
+                </a:solidFill>
+              </a:rPr>
+              <a:t>:</a:t>
+            </a:r>
+            <a:r>
+              <a:rPr lang="ko-KR" altLang="en-US" sz="900">
+                <a:solidFill>
+                  <a:srgbClr val="f2f2f2"/>
+                </a:solidFill>
+              </a:rPr>
+              <a:t> 미리캔버스</a:t>
+            </a:r>
+            <a:r>
+              <a:rPr lang="en-US" altLang="ko-KR" sz="900">
+                <a:solidFill>
+                  <a:srgbClr val="f2f2f2"/>
+                </a:solidFill>
+              </a:rPr>
+              <a:t>,</a:t>
+            </a:r>
+            <a:r>
+              <a:rPr lang="ko-KR" altLang="en-US" sz="900">
+                <a:solidFill>
+                  <a:srgbClr val="f2f2f2"/>
+                </a:solidFill>
+              </a:rPr>
+              <a:t> </a:t>
+            </a:r>
+            <a:r>
+              <a:rPr lang="en-US" altLang="ko-KR" sz="900">
+                <a:solidFill>
+                  <a:srgbClr val="f2f2f2"/>
+                </a:solidFill>
+              </a:rPr>
+              <a:t>AI</a:t>
+            </a:r>
+            <a:r>
+              <a:rPr lang="ko-KR" altLang="en-US" sz="900">
+                <a:solidFill>
+                  <a:srgbClr val="f2f2f2"/>
+                </a:solidFill>
+              </a:rPr>
+              <a:t> 활용 이미지</a:t>
+            </a:r>
+            <a:endParaRPr lang="ko-KR" altLang="en-US" sz="900">
+              <a:solidFill>
+                <a:srgbClr val="f2f2f2"/>
+              </a:solidFill>
+            </a:endParaRPr>
+          </a:p>
+        </p:txBody>
+      </p:sp>
     </p:spTree>
     <p:extLst>
       <p:ext uri="{BB962C8B-B14F-4D97-AF65-F5344CB8AC3E}">
@@ -24035,7 +24628,7 @@
 </file>
 
 <file path=ppt/slides/slide8.xml><?xml version="1.0" encoding="utf-8"?>
-<p:sld xmlns:a="http://schemas.openxmlformats.org/drawingml/2006/main" xmlns:r="http://schemas.openxmlformats.org/officeDocument/2006/relationships" xmlns:p="http://schemas.openxmlformats.org/presentationml/2006/main">
+<p:sld xmlns:r="http://schemas.openxmlformats.org/officeDocument/2006/relationships" xmlns:c="http://schemas.openxmlformats.org/drawingml/2006/chart" xmlns:a="http://schemas.openxmlformats.org/drawingml/2006/main" xmlns:dgm="http://schemas.openxmlformats.org/drawingml/2006/diagram" xmlns:dsp="http://schemas.microsoft.com/office/drawing/2008/diagram" xmlns:p="http://schemas.openxmlformats.org/presentationml/2006/main">
   <p:cSld>
     <p:spTree>
       <p:nvGrpSpPr>
@@ -24617,6 +25210,101 @@
           </a:prstGeom>
         </p:spPr>
       </p:pic>
+      <p:sp>
+        <p:nvSpPr>
+          <p:cNvPr id="21" name="가로 글상자 20"/>
+          <p:cNvSpPr txBox="1"/>
+          <p:nvPr/>
+        </p:nvSpPr>
+        <p:spPr>
+          <a:xfrm>
+            <a:off x="9162218" y="6168936"/>
+            <a:ext cx="2902783" cy="220747"/>
+          </a:xfrm>
+          <a:prstGeom prst="rect">
+            <a:avLst/>
+          </a:prstGeom>
+        </p:spPr>
+        <p:txBody>
+          <a:bodyPr wrap="square">
+            <a:spAutoFit/>
+          </a:bodyPr>
+          <a:p>
+            <a:pPr lvl="0" algn="r">
+              <a:defRPr/>
+            </a:pPr>
+            <a:r>
+              <a:rPr lang="en-US" altLang="ko-KR" sz="900">
+                <a:solidFill>
+                  <a:srgbClr val="f2f2f2"/>
+                </a:solidFill>
+              </a:rPr>
+              <a:t>*</a:t>
+            </a:r>
+            <a:r>
+              <a:rPr lang="ko-KR" altLang="en-US" sz="900">
+                <a:solidFill>
+                  <a:srgbClr val="f2f2f2"/>
+                </a:solidFill>
+              </a:rPr>
+              <a:t>이미지 출처</a:t>
+            </a:r>
+            <a:r>
+              <a:rPr lang="en-US" altLang="ko-KR" sz="900">
+                <a:solidFill>
+                  <a:srgbClr val="f2f2f2"/>
+                </a:solidFill>
+              </a:rPr>
+              <a:t>:</a:t>
+            </a:r>
+            <a:r>
+              <a:rPr lang="ko-KR" altLang="en-US" sz="900">
+                <a:solidFill>
+                  <a:srgbClr val="f2f2f2"/>
+                </a:solidFill>
+              </a:rPr>
+              <a:t> 미리캔버스</a:t>
+            </a:r>
+            <a:r>
+              <a:rPr lang="en-US" altLang="ko-KR" sz="900">
+                <a:solidFill>
+                  <a:srgbClr val="f2f2f2"/>
+                </a:solidFill>
+              </a:rPr>
+              <a:t>,</a:t>
+            </a:r>
+            <a:r>
+              <a:rPr lang="ko-KR" altLang="en-US" sz="900">
+                <a:solidFill>
+                  <a:srgbClr val="f2f2f2"/>
+                </a:solidFill>
+              </a:rPr>
+              <a:t> </a:t>
+            </a:r>
+            <a:r>
+              <a:rPr lang="en-US" altLang="ko-KR" sz="900">
+                <a:solidFill>
+                  <a:srgbClr val="f2f2f2"/>
+                </a:solidFill>
+              </a:rPr>
+              <a:t>AI</a:t>
+            </a:r>
+            <a:r>
+              <a:rPr lang="ko-KR" altLang="en-US" sz="900">
+                <a:solidFill>
+                  <a:srgbClr val="f2f2f2"/>
+                </a:solidFill>
+              </a:rPr>
+              <a:t> 활용 이미지</a:t>
+            </a:r>
+            <a:endParaRPr lang="ko-KR" altLang="en-US" sz="900">
+              <a:solidFill>
+                <a:srgbClr val="f2f2f2"/>
+              </a:solidFill>
+            </a:endParaRPr>
+          </a:p>
+        </p:txBody>
+      </p:sp>
     </p:spTree>
     <p:extLst>
       <p:ext uri="{BB962C8B-B14F-4D97-AF65-F5344CB8AC3E}">

--- a/3차시_PPT.pptx
+++ b/3차시_PPT.pptx
@@ -9865,7 +9865,7 @@
         <p:spPr>
           <a:xfrm>
             <a:off x="210712" y="245155"/>
-            <a:ext cx="11915817" cy="3133037"/>
+            <a:ext cx="11915818" cy="3162890"/>
           </a:xfrm>
           <a:prstGeom prst="rect">
             <a:avLst/>
@@ -10244,10 +10244,17 @@
             </a:endParaRPr>
           </a:p>
           <a:p>
-            <a:pPr lvl="0">
+            <a:pPr marL="0" marR="0" lvl="0" indent="0" algn="l" rtl="0">
               <a:lnSpc>
                 <a:spcPct val="120000"/>
               </a:lnSpc>
+              <a:spcBef>
+                <a:spcPts val="0"/>
+              </a:spcBef>
+              <a:spcAft>
+                <a:spcPts val="0"/>
+              </a:spcAft>
+              <a:buNone/>
               <a:defRPr/>
             </a:pPr>
             <a:r>
@@ -10320,6 +10327,26 @@
                 <a:ea typeface="나눔고딕"/>
               </a:rPr>
               <a:t>)</a:t>
+            </a:r>
+            <a:r>
+              <a:rPr lang="ko-KR" altLang="en-US" sz="1600" b="0" i="0" u="none" strike="noStrike" cap="none">
+                <a:solidFill>
+                  <a:schemeClr val="dk1"/>
+                </a:solidFill>
+                <a:latin typeface="나눔고딕"/>
+                <a:ea typeface="나눔고딕"/>
+              </a:rPr>
+              <a:t> 비밀번호 </a:t>
+            </a:r>
+            <a:r>
+              <a:rPr lang="en-US" altLang="ko-KR" sz="1600" b="0" i="0" u="none" strike="noStrike" cap="none">
+                <a:solidFill>
+                  <a:schemeClr val="dk1"/>
+                </a:solidFill>
+                <a:latin typeface="나눔고딕"/>
+                <a:ea typeface="나눔고딕"/>
+              </a:rPr>
+              <a:t>2026</a:t>
             </a:r>
             <a:endParaRPr lang="en-US" altLang="ko-KR" sz="2400">
               <a:solidFill>
